--- a/lessons/lesson-10/slides.pptx
+++ b/lessons/lesson-10/slides.pptx
@@ -2,28 +2,29 @@
 <file path=ppt/presentation.xml><?xml version="1.0" encoding="utf-8"?>
 <p:presentation xmlns:p="http://schemas.openxmlformats.org/presentationml/2006/main">
   <p:sldMasterIdLst>
-    <p:sldMasterId xmlns:r="http://schemas.openxmlformats.org/officeDocument/2006/relationships" id="2147483648" r:id="R4510bafdcbf9419b"/>
+    <p:sldMasterId xmlns:r="http://schemas.openxmlformats.org/officeDocument/2006/relationships" id="2147483648" r:id="R7ffff05465da4b50"/>
   </p:sldMasterIdLst>
   <p:notesMasterIdLst>
-    <p:notesMasterId xmlns:r="http://schemas.openxmlformats.org/officeDocument/2006/relationships" r:id="R2bb51092ea044c26"/>
+    <p:notesMasterId xmlns:r="http://schemas.openxmlformats.org/officeDocument/2006/relationships" r:id="R22eda3ad662a4a72"/>
   </p:notesMasterIdLst>
   <p:sldIdLst>
-    <p:sldId xmlns:r="http://schemas.openxmlformats.org/officeDocument/2006/relationships" id="256" r:id="R9ff379020d50411c"/>
-    <p:sldId xmlns:r="http://schemas.openxmlformats.org/officeDocument/2006/relationships" id="257" r:id="R5d2c0aeed2ce441c"/>
-    <p:sldId xmlns:r="http://schemas.openxmlformats.org/officeDocument/2006/relationships" id="258" r:id="Rbc8cf2fc59d246ff"/>
-    <p:sldId xmlns:r="http://schemas.openxmlformats.org/officeDocument/2006/relationships" id="259" r:id="R6852dee674c44ba6"/>
-    <p:sldId xmlns:r="http://schemas.openxmlformats.org/officeDocument/2006/relationships" id="260" r:id="R41f098271962487b"/>
-    <p:sldId xmlns:r="http://schemas.openxmlformats.org/officeDocument/2006/relationships" id="261" r:id="R3a4a64ba51cb4948"/>
-    <p:sldId xmlns:r="http://schemas.openxmlformats.org/officeDocument/2006/relationships" id="262" r:id="Rce887806cf8f417d"/>
-    <p:sldId xmlns:r="http://schemas.openxmlformats.org/officeDocument/2006/relationships" id="263" r:id="R0041e3890f594771"/>
-    <p:sldId xmlns:r="http://schemas.openxmlformats.org/officeDocument/2006/relationships" id="264" r:id="Rb8445a8197274f5b"/>
-    <p:sldId xmlns:r="http://schemas.openxmlformats.org/officeDocument/2006/relationships" id="265" r:id="R81db0bc243194c88"/>
-    <p:sldId xmlns:r="http://schemas.openxmlformats.org/officeDocument/2006/relationships" id="266" r:id="Rc4f31243897c4892"/>
-    <p:sldId xmlns:r="http://schemas.openxmlformats.org/officeDocument/2006/relationships" id="267" r:id="Rbeec61b4a5314ea6"/>
-    <p:sldId xmlns:r="http://schemas.openxmlformats.org/officeDocument/2006/relationships" id="268" r:id="Rd7101322991a4f76"/>
-    <p:sldId xmlns:r="http://schemas.openxmlformats.org/officeDocument/2006/relationships" id="269" r:id="R3e66cb506d464c16"/>
-    <p:sldId xmlns:r="http://schemas.openxmlformats.org/officeDocument/2006/relationships" id="270" r:id="R127c270fa96b4a25"/>
-    <p:sldId xmlns:r="http://schemas.openxmlformats.org/officeDocument/2006/relationships" id="271" r:id="R6596309757a04f4e"/>
+    <p:sldId xmlns:r="http://schemas.openxmlformats.org/officeDocument/2006/relationships" id="256" r:id="R59e358d8a8594719"/>
+    <p:sldId xmlns:r="http://schemas.openxmlformats.org/officeDocument/2006/relationships" id="257" r:id="Rd1d06b401382494d"/>
+    <p:sldId xmlns:r="http://schemas.openxmlformats.org/officeDocument/2006/relationships" id="258" r:id="R8c758d21be574706"/>
+    <p:sldId xmlns:r="http://schemas.openxmlformats.org/officeDocument/2006/relationships" id="259" r:id="Rb32dc98d798f4e97"/>
+    <p:sldId xmlns:r="http://schemas.openxmlformats.org/officeDocument/2006/relationships" id="260" r:id="R2643d77c2c4b4b23"/>
+    <p:sldId xmlns:r="http://schemas.openxmlformats.org/officeDocument/2006/relationships" id="261" r:id="Rfa314951c9f440e7"/>
+    <p:sldId xmlns:r="http://schemas.openxmlformats.org/officeDocument/2006/relationships" id="262" r:id="R1ab125fc92cd44e3"/>
+    <p:sldId xmlns:r="http://schemas.openxmlformats.org/officeDocument/2006/relationships" id="263" r:id="R59ff6140d68b45fd"/>
+    <p:sldId xmlns:r="http://schemas.openxmlformats.org/officeDocument/2006/relationships" id="264" r:id="R603dea1766924930"/>
+    <p:sldId xmlns:r="http://schemas.openxmlformats.org/officeDocument/2006/relationships" id="265" r:id="Rc41027d58c0f48e3"/>
+    <p:sldId xmlns:r="http://schemas.openxmlformats.org/officeDocument/2006/relationships" id="266" r:id="R784c0c05c4e14545"/>
+    <p:sldId xmlns:r="http://schemas.openxmlformats.org/officeDocument/2006/relationships" id="267" r:id="R30d645d0dbda4993"/>
+    <p:sldId xmlns:r="http://schemas.openxmlformats.org/officeDocument/2006/relationships" id="268" r:id="R89812a7ef3c14df1"/>
+    <p:sldId xmlns:r="http://schemas.openxmlformats.org/officeDocument/2006/relationships" id="269" r:id="Rab7e81ad01db423f"/>
+    <p:sldId xmlns:r="http://schemas.openxmlformats.org/officeDocument/2006/relationships" id="270" r:id="Rc3c4934987d94d5b"/>
+    <p:sldId xmlns:r="http://schemas.openxmlformats.org/officeDocument/2006/relationships" id="271" r:id="R44b576d0990943f3"/>
+    <p:sldId xmlns:r="http://schemas.openxmlformats.org/officeDocument/2006/relationships" id="272" r:id="R21e48d94e2744f10"/>
   </p:sldIdLst>
   <p:sldSz cx="12192000" cy="6858000"/>
   <p:notesSz cx="6858000" cy="9144000"/>
@@ -403,7 +404,7 @@
           <a:lstStyle xmlns:a="http://schemas.openxmlformats.org/drawingml/2006/main"/>
           <a:p xmlns:a="http://schemas.openxmlformats.org/drawingml/2006/main">
             <a:r>
-              <a:t>开场直接提出核心问题：当 Agent 修改代码、运行测试、归因错误时，研究者在哪里审核、用什么权限边界、留什么记录？本课只完成一次受限执行，不展开自动化循环。</a:t>
+              <a:t>本讲聚焦“AI 辅助编码、调试与受限 Agent 执行”。封面只保留正式课名，课堂问题从下一页展开。</a:t>
             </a:r>
           </a:p>
           <a:p xmlns:a="http://schemas.openxmlformats.org/drawingml/2006/main">
@@ -419,11 +420,6 @@
           <a:p xmlns:a="http://schemas.openxmlformats.org/drawingml/2006/main">
             <a:r>
               <a:t>- /Users/bright/Projects/courses/graduate/course/syllabus.md</a:t>
-            </a:r>
-          </a:p>
-          <a:p xmlns:a="http://schemas.openxmlformats.org/drawingml/2006/main">
-            <a:r>
-              <a:t>- /Users/bright/Projects/courses/graduate/lessons/lesson-10/handout.md</a:t>
             </a:r>
           </a:p>
           <a:p xmlns:a="http://schemas.openxmlformats.org/drawingml/2006/main">
@@ -1074,6 +1070,106 @@
 </file>
 
 <file path=ppt/notesSlides/notesSlide16.xml><?xml version="1.0" encoding="utf-8"?>
+<p:notes xmlns:p="http://schemas.openxmlformats.org/presentationml/2006/main">
+  <p:cSld>
+    <p:spTree>
+      <p:nvGrpSpPr>
+        <p:cNvPr id="1" name=""/>
+        <p:cNvGrpSpPr/>
+        <p:nvPr/>
+      </p:nvGrpSpPr>
+      <p:grpSpPr>
+        <a:xfrm xmlns:a="http://schemas.openxmlformats.org/drawingml/2006/main"/>
+      </p:grpSpPr>
+      <p:sp>
+        <p:nvSpPr>
+          <p:cNvPr id="2" name="Slide Image Placeholder 1"/>
+          <p:cNvSpPr>
+            <a:spLocks xmlns:a="http://schemas.openxmlformats.org/drawingml/2006/main" noGrp="1"/>
+          </p:cNvSpPr>
+          <p:nvPr>
+            <p:ph type="sldImg" idx="0"/>
+          </p:nvPr>
+        </p:nvSpPr>
+        <p:spPr/>
+      </p:sp>
+      <p:sp>
+        <p:nvSpPr>
+          <p:cNvPr id="3" name="Notes Placeholder 2"/>
+          <p:cNvSpPr>
+            <a:spLocks xmlns:a="http://schemas.openxmlformats.org/drawingml/2006/main" noGrp="1"/>
+          </p:cNvSpPr>
+          <p:nvPr>
+            <p:ph type="body" idx="1"/>
+          </p:nvPr>
+        </p:nvSpPr>
+        <p:spPr/>
+        <p:txBody>
+          <a:bodyPr xmlns:a="http://schemas.openxmlformats.org/drawingml/2006/main"/>
+          <a:lstStyle xmlns:a="http://schemas.openxmlformats.org/drawingml/2006/main"/>
+          <a:p xmlns:a="http://schemas.openxmlformats.org/drawingml/2006/main">
+            <a:r>
+              <a:t>回收本讲核心概念及其关系。本页不新增任务；请学生用边界句检查自己的项目工件。</a:t>
+            </a:r>
+          </a:p>
+          <a:p xmlns:a="http://schemas.openxmlformats.org/drawingml/2006/main">
+            <a:r>
+              <a:t/>
+            </a:r>
+          </a:p>
+          <a:p xmlns:a="http://schemas.openxmlformats.org/drawingml/2006/main">
+            <a:r>
+              <a:t>[Sources]</a:t>
+            </a:r>
+          </a:p>
+          <a:p xmlns:a="http://schemas.openxmlformats.org/drawingml/2006/main">
+            <a:r>
+              <a:t>- /Users/bright/Projects/courses/graduate/course/syllabus.md</a:t>
+            </a:r>
+          </a:p>
+          <a:p xmlns:a="http://schemas.openxmlformats.org/drawingml/2006/main">
+            <a:r>
+              <a:t>- /Users/bright/Projects/courses/graduate/lessons/lesson-10/handout.md</a:t>
+            </a:r>
+          </a:p>
+          <a:p xmlns:a="http://schemas.openxmlformats.org/drawingml/2006/main">
+            <a:r>
+              <a:t>- /Users/bright/Projects/courses/graduate/lessons/lesson-10/slides.md</a:t>
+            </a:r>
+          </a:p>
+          <a:p xmlns:a="http://schemas.openxmlformats.org/drawingml/2006/main">
+            <a:r>
+              <a:t>[/Sources]</a:t>
+            </a:r>
+          </a:p>
+        </p:txBody>
+      </p:sp>
+      <p:sp>
+        <p:nvSpPr>
+          <p:cNvPr id="4" name="Slide Number Placeholder 3"/>
+          <p:cNvSpPr>
+            <a:spLocks xmlns:a="http://schemas.openxmlformats.org/drawingml/2006/main" noGrp="1"/>
+          </p:cNvSpPr>
+          <p:nvPr>
+            <p:ph type="sldNum" idx="5"/>
+          </p:nvPr>
+        </p:nvSpPr>
+        <p:spPr/>
+        <p:txBody>
+          <a:bodyPr xmlns:a="http://schemas.openxmlformats.org/drawingml/2006/main"/>
+          <a:lstStyle xmlns:a="http://schemas.openxmlformats.org/drawingml/2006/main"/>
+          <a:p xmlns:a="http://schemas.openxmlformats.org/drawingml/2006/main"/>
+        </p:txBody>
+      </p:sp>
+    </p:spTree>
+  </p:cSld>
+  <p:clrMapOvr>
+    <a:masterClrMapping xmlns:a="http://schemas.openxmlformats.org/drawingml/2006/main"/>
+  </p:clrMapOvr>
+</p:notes>
+</file>
+
+<file path=ppt/notesSlides/notesSlide17.xml><?xml version="1.0" encoding="utf-8"?>
 <p:notes xmlns:p="http://schemas.openxmlformats.org/presentationml/2006/main">
   <p:cSld>
     <p:spTree>
@@ -1994,7 +2090,7 @@
           <p:nvPr/>
         </p:nvPicPr>
         <p:blipFill>
-          <a:blip xmlns:r="http://schemas.openxmlformats.org/officeDocument/2006/relationships" xmlns:a="http://schemas.openxmlformats.org/drawingml/2006/main" r:embed="Rc1ce783da2e044fe">
+          <a:blip xmlns:r="http://schemas.openxmlformats.org/officeDocument/2006/relationships" xmlns:a="http://schemas.openxmlformats.org/drawingml/2006/main" r:embed="R16057e02e3d54a38">
             <a:duotone>
               <a:prstClr val="black"/>
               <a:schemeClr val="accent1">
@@ -2172,7 +2268,7 @@
           <p:nvPr/>
         </p:nvPicPr>
         <p:blipFill rotWithShape="1">
-          <a:blip xmlns:r="http://schemas.openxmlformats.org/officeDocument/2006/relationships" xmlns:a="http://schemas.openxmlformats.org/drawingml/2006/main" r:embed="R876595c3652c4209"/>
+          <a:blip xmlns:r="http://schemas.openxmlformats.org/officeDocument/2006/relationships" xmlns:a="http://schemas.openxmlformats.org/drawingml/2006/main" r:embed="Rb14fd00305aa4162"/>
           <a:srcRect xmlns:a="http://schemas.openxmlformats.org/drawingml/2006/main" l="74359" t="0" r="1346" b="0"/>
           <a:stretch xmlns:a="http://schemas.openxmlformats.org/drawingml/2006/main"/>
         </p:blipFill>
@@ -2195,7 +2291,7 @@
           <p:nvPr/>
         </p:nvPicPr>
         <p:blipFill rotWithShape="1">
-          <a:blip xmlns:r="http://schemas.openxmlformats.org/officeDocument/2006/relationships" xmlns:a="http://schemas.openxmlformats.org/drawingml/2006/main" r:embed="R45768752fe0546f7">
+          <a:blip xmlns:r="http://schemas.openxmlformats.org/officeDocument/2006/relationships" xmlns:a="http://schemas.openxmlformats.org/drawingml/2006/main" r:embed="R060fac9f96624e5c">
             <a:alphaModFix amt="35000"/>
           </a:blip>
           <a:srcRect xmlns:a="http://schemas.openxmlformats.org/drawingml/2006/main" l="0" t="9831" r="0" b="36385"/>
@@ -2457,7 +2553,7 @@
           <p:nvPr/>
         </p:nvPicPr>
         <p:blipFill>
-          <a:blip xmlns:r="http://schemas.openxmlformats.org/officeDocument/2006/relationships" xmlns:a="http://schemas.openxmlformats.org/drawingml/2006/main" r:embed="R3af289aac5ff4cf9"/>
+          <a:blip xmlns:r="http://schemas.openxmlformats.org/officeDocument/2006/relationships" xmlns:a="http://schemas.openxmlformats.org/drawingml/2006/main" r:embed="R2789f019f2cc46b6"/>
           <a:srcRect xmlns:a="http://schemas.openxmlformats.org/drawingml/2006/main" l="0" t="0" r="54251" b="0"/>
           <a:stretch xmlns:a="http://schemas.openxmlformats.org/drawingml/2006/main"/>
         </p:blipFill>
@@ -2714,7 +2810,7 @@
           <p:nvPr/>
         </p:nvPicPr>
         <p:blipFill rotWithShape="1">
-          <a:blip xmlns:r="http://schemas.openxmlformats.org/officeDocument/2006/relationships" xmlns:a="http://schemas.openxmlformats.org/drawingml/2006/main" r:embed="R9aed825c1e9240ae"/>
+          <a:blip xmlns:r="http://schemas.openxmlformats.org/officeDocument/2006/relationships" xmlns:a="http://schemas.openxmlformats.org/drawingml/2006/main" r:embed="Reb26aa72531c4414"/>
           <a:srcRect xmlns:a="http://schemas.openxmlformats.org/drawingml/2006/main" l="0" t="0" r="1346" b="0"/>
           <a:stretch xmlns:a="http://schemas.openxmlformats.org/drawingml/2006/main"/>
         </p:blipFill>
@@ -2897,7 +2993,7 @@
           <p:nvPr/>
         </p:nvPicPr>
         <p:blipFill>
-          <a:blip xmlns:r="http://schemas.openxmlformats.org/officeDocument/2006/relationships" xmlns:a="http://schemas.openxmlformats.org/drawingml/2006/main" r:embed="R9731871e37da4b06"/>
+          <a:blip xmlns:r="http://schemas.openxmlformats.org/officeDocument/2006/relationships" xmlns:a="http://schemas.openxmlformats.org/drawingml/2006/main" r:embed="R3e905216ed834ecd"/>
           <a:stretch xmlns:a="http://schemas.openxmlformats.org/drawingml/2006/main">
             <a:fillRect l="0" t="0" r="0" b="0"/>
           </a:stretch>
@@ -2993,7 +3089,7 @@
           <p:nvPr/>
         </p:nvPicPr>
         <p:blipFill>
-          <a:blip xmlns:r="http://schemas.openxmlformats.org/officeDocument/2006/relationships" xmlns:a="http://schemas.openxmlformats.org/drawingml/2006/main" r:embed="R94f1d60311e54f79">
+          <a:blip xmlns:r="http://schemas.openxmlformats.org/officeDocument/2006/relationships" xmlns:a="http://schemas.openxmlformats.org/drawingml/2006/main" r:embed="R7cd9b4519d5a437a">
             <a:duotone>
               <a:prstClr val="black"/>
               <a:schemeClr val="accent1">
@@ -3160,7 +3256,7 @@
           <p:nvPr/>
         </p:nvPicPr>
         <p:blipFill rotWithShape="1">
-          <a:blip xmlns:r="http://schemas.openxmlformats.org/officeDocument/2006/relationships" xmlns:a="http://schemas.openxmlformats.org/drawingml/2006/main" r:embed="R430bd8bdc3ff4273">
+          <a:blip xmlns:r="http://schemas.openxmlformats.org/officeDocument/2006/relationships" xmlns:a="http://schemas.openxmlformats.org/drawingml/2006/main" r:embed="R2bedd386bbdc43b9">
             <a:alphaModFix amt="20000"/>
             <a:duotone>
               <a:schemeClr val="accent4">
@@ -3258,10 +3354,10 @@
   </p:cSld>
   <p:clrMap bg1="lt1" tx1="dk1" bg2="lt2" tx2="dk2" accent1="accent1" accent2="accent2" accent3="accent3" accent4="accent4" accent5="accent5" accent6="accent6" hlink="hlink" folHlink="folHlink"/>
   <p:sldLayoutIdLst>
-    <p:sldLayoutId xmlns:r="http://schemas.openxmlformats.org/officeDocument/2006/relationships" id="2147483649" r:id="Rdea0407b81f54fa2"/>
-    <p:sldLayoutId xmlns:r="http://schemas.openxmlformats.org/officeDocument/2006/relationships" id="2147483650" r:id="Rcab429942206426f"/>
-    <p:sldLayoutId xmlns:r="http://schemas.openxmlformats.org/officeDocument/2006/relationships" id="2147483651" r:id="R2ee599990e86415d"/>
-    <p:sldLayoutId xmlns:r="http://schemas.openxmlformats.org/officeDocument/2006/relationships" id="2147483652" r:id="Rb15892e6f12e487f"/>
+    <p:sldLayoutId xmlns:r="http://schemas.openxmlformats.org/officeDocument/2006/relationships" id="2147483649" r:id="R6c3fb7840c2a472f"/>
+    <p:sldLayoutId xmlns:r="http://schemas.openxmlformats.org/officeDocument/2006/relationships" id="2147483650" r:id="R9836c1a86eec403b"/>
+    <p:sldLayoutId xmlns:r="http://schemas.openxmlformats.org/officeDocument/2006/relationships" id="2147483651" r:id="Rfa963669f8734801"/>
+    <p:sldLayoutId xmlns:r="http://schemas.openxmlformats.org/officeDocument/2006/relationships" id="2147483652" r:id="R952d2361d49e4962"/>
   </p:sldLayoutIdLst>
   <p:hf hdr="0" ftr="0" dt="0"/>
   <p:txStyles>
@@ -3794,120 +3890,6 @@
       </p:grpSpPr>
       <p:sp>
         <p:nvSpPr>
-          <p:cNvPr id="3" name="内容占位符 2">
-            <a:extLst xmlns:a="http://schemas.openxmlformats.org/drawingml/2006/main">
-              <a:ext uri="{FF2B5EF4-FFF2-40B4-BE49-F238E27FC236}">
-                <a16:creationId xmlns:a16="http://schemas.microsoft.com/office/drawing/2014/main" id="{D1D30E0E-D2D5-4C08-A919-2A1C2D5A8D02}"/>
-              </a:ext>
-            </a:extLst>
-          </p:cNvPr>
-          <p:cNvSpPr>
-            <a:spLocks xmlns:a="http://schemas.openxmlformats.org/drawingml/2006/main" noGrp="1"/>
-          </p:cNvSpPr>
-          <p:nvPr>
-            <p:ph idx="10"/>
-          </p:nvPr>
-        </p:nvSpPr>
-        <p:spPr>
-          <a:xfrm xmlns:a="http://schemas.openxmlformats.org/drawingml/2006/main">
-            <a:off x="1238250" y="3048000"/>
-            <a:ext cx="9715500" cy="2343150"/>
-          </a:xfrm>
-        </p:spPr>
-        <p:txBody>
-          <a:bodyPr xmlns:a="http://schemas.openxmlformats.org/drawingml/2006/main" lIns="0" tIns="0" rIns="0" bIns="0" anchor="ctr"/>
-          <a:lstStyle xmlns:a="http://schemas.openxmlformats.org/drawingml/2006/main"/>
-          <a:p xmlns:a="http://schemas.openxmlformats.org/drawingml/2006/main">
-            <a:pPr algn="ctr">
-              <a:lnSpc>
-                <a:spcPct val="125000"/>
-              </a:lnSpc>
-              <a:buNone/>
-            </a:pPr>
-            <a:r>
-              <a:rPr sz="1800" b="1">
-                <a:solidFill>
-                  <a:srgbClr val="18354E"/>
-                </a:solidFill>
-                <a:latin typeface="Microsoft YaHei"/>
-                <a:ea typeface="Microsoft YaHei"/>
-                <a:cs typeface="Microsoft YaHei"/>
-              </a:rPr>
-              <a:t>第 9 课实验规格 → 任务契约 → 受限执行 → 人工核验</a:t>
-            </a:r>
-            <a:endParaRPr>
-              <a:latin typeface="+mn-ea"/>
-              <a:ea typeface="+mn-ea"/>
-              <a:cs typeface="+mn-ea"/>
-            </a:endParaRPr>
-          </a:p>
-          <a:p xmlns:a="http://schemas.openxmlformats.org/drawingml/2006/main">
-            <a:r>
-              <a:rPr>
-                <a:latin typeface="+mn-ea"/>
-                <a:ea typeface="+mn-ea"/>
-                <a:cs typeface="+mn-ea"/>
-              </a:rPr>
-              <a:t/>
-            </a:r>
-            <a:endParaRPr>
-              <a:latin typeface="+mn-ea"/>
-              <a:ea typeface="+mn-ea"/>
-              <a:cs typeface="+mn-ea"/>
-            </a:endParaRPr>
-          </a:p>
-          <a:p xmlns:a="http://schemas.openxmlformats.org/drawingml/2006/main">
-            <a:pPr algn="ctr">
-              <a:lnSpc>
-                <a:spcPct val="125000"/>
-              </a:lnSpc>
-              <a:buNone/>
-            </a:pPr>
-            <a:r>
-              <a:rPr sz="1800" b="1">
-                <a:solidFill>
-                  <a:srgbClr val="18354E"/>
-                </a:solidFill>
-                <a:latin typeface="Microsoft YaHei"/>
-                <a:ea typeface="Microsoft YaHei"/>
-                <a:cs typeface="Microsoft YaHei"/>
-              </a:rPr>
-              <a:t>边界、审核与记录，使 Agent 帮忙不替代研究判断</a:t>
-            </a:r>
-            <a:endParaRPr>
-              <a:latin typeface="+mn-ea"/>
-              <a:ea typeface="+mn-ea"/>
-              <a:cs typeface="+mn-ea"/>
-            </a:endParaRPr>
-          </a:p>
-          <a:p xmlns:a="http://schemas.openxmlformats.org/drawingml/2006/main">
-            <a:pPr algn="ctr">
-              <a:lnSpc>
-                <a:spcPct val="125000"/>
-              </a:lnSpc>
-              <a:buNone/>
-            </a:pPr>
-            <a:r>
-              <a:rPr sz="1800" b="1">
-                <a:solidFill>
-                  <a:srgbClr val="18354E"/>
-                </a:solidFill>
-                <a:latin typeface="Microsoft YaHei"/>
-                <a:ea typeface="Microsoft YaHei"/>
-                <a:cs typeface="Microsoft YaHei"/>
-              </a:rPr>
-              <a:t>第十讲｜阶段七：原型验证 → 第 11 课自动化循环</a:t>
-            </a:r>
-            <a:endParaRPr>
-              <a:latin typeface="+mn-ea"/>
-              <a:ea typeface="+mn-ea"/>
-              <a:cs typeface="+mn-ea"/>
-            </a:endParaRPr>
-          </a:p>
-        </p:txBody>
-      </p:sp>
-      <p:sp>
-        <p:nvSpPr>
           <p:cNvPr id="2" name="矩形 11">
             <a:extLst xmlns:a="http://schemas.openxmlformats.org/drawingml/2006/main">
               <a:ext uri="{FF2B5EF4-FFF2-40B4-BE49-F238E27FC236}">
@@ -3922,27 +3904,27 @@
         </p:nvSpPr>
         <p:spPr>
           <a:xfrm xmlns:a="http://schemas.openxmlformats.org/drawingml/2006/main">
-            <a:off x="1333500" y="1295400"/>
-            <a:ext cx="9525000" cy="1645920"/>
+            <a:off x="1143000" y="1790700"/>
+            <a:ext cx="9906000" cy="1524000"/>
           </a:xfrm>
           <a:prstGeom xmlns:a="http://schemas.openxmlformats.org/drawingml/2006/main" prst="rect">
             <a:avLst/>
           </a:prstGeom>
         </p:spPr>
         <p:txBody>
-          <a:bodyPr xmlns:a="http://schemas.openxmlformats.org/drawingml/2006/main" lIns="0" tIns="0" rIns="0" bIns="0" anchor="ctr">
+          <a:bodyPr xmlns:a="http://schemas.openxmlformats.org/drawingml/2006/main" lIns="76200" tIns="38100" rIns="76200" bIns="38100" anchor="ctr">
             <a:spAutoFit/>
           </a:bodyPr>
           <a:lstStyle xmlns:a="http://schemas.openxmlformats.org/drawingml/2006/main"/>
           <a:p xmlns:a="http://schemas.openxmlformats.org/drawingml/2006/main">
             <a:pPr algn="ctr">
               <a:lnSpc>
-                <a:spcPct val="150000"/>
+                <a:spcPct val="112000"/>
               </a:lnSpc>
               <a:buNone/>
             </a:pPr>
             <a:r>
-              <a:rPr sz="2925" b="1">
+              <a:rPr sz="3150" b="1">
                 <a:solidFill>
                   <a:srgbClr val="C8161E"/>
                 </a:solidFill>
@@ -3950,7 +3932,7 @@
                 <a:ea typeface="Microsoft YaHei"/>
                 <a:cs typeface="Microsoft YaHei"/>
               </a:rPr>
-              <a:t>AI 辅助编码、调试与受限 Agent 执行</a:t>
+              <a:t>第10讲 AI 辅助编码、调试与受限 Agent 执行</a:t>
             </a:r>
             <a:endParaRPr sz="4000" b="1" kern="0" spc="20">
               <a:solidFill>
@@ -12092,10 +12074,13 @@
           </a:xfrm>
         </p:spPr>
         <p:txBody>
-          <a:bodyPr xmlns:a="http://schemas.openxmlformats.org/drawingml/2006/main" lIns="76200" tIns="0" rIns="76200" bIns="0" anchor="ctr"/>
+          <a:bodyPr xmlns:a="http://schemas.openxmlformats.org/drawingml/2006/main" lIns="76200" tIns="38100" rIns="76200" bIns="38100" anchor="ctr"/>
           <a:lstStyle xmlns:a="http://schemas.openxmlformats.org/drawingml/2006/main"/>
           <a:p xmlns:a="http://schemas.openxmlformats.org/drawingml/2006/main">
             <a:pPr algn="l">
+              <a:lnSpc>
+                <a:spcPct val="112000"/>
+              </a:lnSpc>
               <a:buNone/>
             </a:pPr>
             <a:r>
@@ -12107,7 +12092,7 @@
                 <a:ea typeface="Microsoft YaHei"/>
                 <a:cs typeface="Microsoft YaHei"/>
               </a:rPr>
-              <a:t>退出卡：这次 Agent 执行可以被安全地重复吗</a:t>
+              <a:t>本讲知识点总结</a:t>
             </a:r>
             <a:endParaRPr/>
           </a:p>
@@ -12136,6 +12121,901 @@
           <a:p xmlns:a="http://schemas.openxmlformats.org/drawingml/2006/main">
             <a:fld id="{DC9C7607-4BA3-B4DC-A00F-2E67A9FCFF7E}" type="slidenum">
               <a:t>16</a:t>
+            </a:fld>
+            <a:endParaRPr/>
+          </a:p>
+        </p:txBody>
+      </p:sp>
+      <p:sp>
+        <p:nvSpPr>
+          <p:cNvPr id="6" name="summary-10-number-0">
+            <a:extLst xmlns:a="http://schemas.openxmlformats.org/drawingml/2006/main">
+              <a:ext uri="{FF2B5EF4-FFF2-40B4-BE49-F238E27FC236}">
+                <a16:creationId xmlns:a16="http://schemas.microsoft.com/office/drawing/2014/main" id="{351A36F8-31E3-4604-B46E-2779FE8279DB}"/>
+              </a:ext>
+            </a:extLst>
+          </p:cNvPr>
+          <p:cNvSpPr>
+            <a:spLocks xmlns:a="http://schemas.openxmlformats.org/drawingml/2006/main" noGrp="1"/>
+          </p:cNvSpPr>
+          <p:nvPr/>
+        </p:nvSpPr>
+        <p:spPr>
+          <a:xfrm xmlns:a="http://schemas.openxmlformats.org/drawingml/2006/main">
+            <a:off x="457200" y="1219200"/>
+            <a:ext cx="476250" cy="476250"/>
+          </a:xfrm>
+          <a:prstGeom xmlns:a="http://schemas.openxmlformats.org/drawingml/2006/main" prst="roundRect">
+            <a:avLst>
+              <a:gd name="adj" fmla="val 16000"/>
+            </a:avLst>
+          </a:prstGeom>
+          <a:solidFill xmlns:a="http://schemas.openxmlformats.org/drawingml/2006/main">
+            <a:srgbClr val="18354E"/>
+          </a:solidFill>
+          <a:ln xmlns:a="http://schemas.openxmlformats.org/drawingml/2006/main" w="0">
+            <a:noFill/>
+            <a:prstDash val="solid"/>
+          </a:ln>
+        </p:spPr>
+        <p:txBody>
+          <a:bodyPr xmlns:a="http://schemas.openxmlformats.org/drawingml/2006/main" lIns="76200" tIns="38100" rIns="76200" bIns="38100" anchor="ctr"/>
+          <a:lstStyle xmlns:a="http://schemas.openxmlformats.org/drawingml/2006/main"/>
+          <a:p xmlns:a="http://schemas.openxmlformats.org/drawingml/2006/main">
+            <a:pPr algn="ctr">
+              <a:lnSpc>
+                <a:spcPct val="112000"/>
+              </a:lnSpc>
+              <a:buNone/>
+              <a:defRPr sz="1500" b="1">
+                <a:solidFill>
+                  <a:srgbClr val="FFFFFF"/>
+                </a:solidFill>
+              </a:defRPr>
+            </a:pPr>
+            <a:r>
+              <a:rPr sz="1500" b="1">
+                <a:solidFill>
+                  <a:srgbClr val="FFFFFF"/>
+                </a:solidFill>
+                <a:latin typeface="Arial"/>
+                <a:ea typeface="Arial"/>
+                <a:cs typeface="Arial"/>
+              </a:rPr>
+              <a:t>1</a:t>
+            </a:r>
+          </a:p>
+        </p:txBody>
+      </p:sp>
+      <p:sp>
+        <p:nvSpPr>
+          <p:cNvPr id="7" name="summary-10-heading-0">
+            <a:extLst xmlns:a="http://schemas.openxmlformats.org/drawingml/2006/main">
+              <a:ext uri="{FF2B5EF4-FFF2-40B4-BE49-F238E27FC236}">
+                <a16:creationId xmlns:a16="http://schemas.microsoft.com/office/drawing/2014/main" id="{60B12BB4-1839-4DB3-B67F-6E3D47E49A4E}"/>
+              </a:ext>
+            </a:extLst>
+          </p:cNvPr>
+          <p:cNvSpPr>
+            <a:spLocks xmlns:a="http://schemas.openxmlformats.org/drawingml/2006/main" noGrp="1"/>
+          </p:cNvSpPr>
+          <p:nvPr/>
+        </p:nvSpPr>
+        <p:spPr>
+          <a:xfrm xmlns:a="http://schemas.openxmlformats.org/drawingml/2006/main">
+            <a:off x="1028700" y="1162050"/>
+            <a:ext cx="2152650" cy="590550"/>
+          </a:xfrm>
+          <a:prstGeom xmlns:a="http://schemas.openxmlformats.org/drawingml/2006/main" prst="roundRect">
+            <a:avLst>
+              <a:gd name="adj" fmla="val 12903"/>
+            </a:avLst>
+          </a:prstGeom>
+          <a:solidFill xmlns:a="http://schemas.openxmlformats.org/drawingml/2006/main">
+            <a:srgbClr val="E8F0F6"/>
+          </a:solidFill>
+          <a:ln xmlns:a="http://schemas.openxmlformats.org/drawingml/2006/main" w="0">
+            <a:noFill/>
+            <a:prstDash val="solid"/>
+          </a:ln>
+        </p:spPr>
+        <p:txBody>
+          <a:bodyPr xmlns:a="http://schemas.openxmlformats.org/drawingml/2006/main" lIns="76200" tIns="38100" rIns="76200" bIns="38100" anchor="ctr"/>
+          <a:lstStyle xmlns:a="http://schemas.openxmlformats.org/drawingml/2006/main"/>
+          <a:p xmlns:a="http://schemas.openxmlformats.org/drawingml/2006/main">
+            <a:pPr algn="ctr">
+              <a:lnSpc>
+                <a:spcPct val="112000"/>
+              </a:lnSpc>
+              <a:buNone/>
+              <a:defRPr sz="1725" b="1">
+                <a:solidFill>
+                  <a:srgbClr val="18354E"/>
+                </a:solidFill>
+              </a:defRPr>
+            </a:pPr>
+            <a:r>
+              <a:rPr sz="1725" b="1">
+                <a:solidFill>
+                  <a:srgbClr val="18354E"/>
+                </a:solidFill>
+                <a:latin typeface="Microsoft YaHei"/>
+                <a:ea typeface="Microsoft YaHei"/>
+                <a:cs typeface="Microsoft YaHei"/>
+              </a:rPr>
+              <a:t>任务契约</a:t>
+            </a:r>
+          </a:p>
+        </p:txBody>
+      </p:sp>
+      <p:sp>
+        <p:nvSpPr>
+          <p:cNvPr id="8" name="summary-10-detail-0">
+            <a:extLst xmlns:a="http://schemas.openxmlformats.org/drawingml/2006/main">
+              <a:ext uri="{FF2B5EF4-FFF2-40B4-BE49-F238E27FC236}">
+                <a16:creationId xmlns:a16="http://schemas.microsoft.com/office/drawing/2014/main" id="{42549185-9927-4F07-89A1-66E7066D46D6}"/>
+              </a:ext>
+            </a:extLst>
+          </p:cNvPr>
+          <p:cNvSpPr>
+            <a:spLocks xmlns:a="http://schemas.openxmlformats.org/drawingml/2006/main" noGrp="1"/>
+          </p:cNvSpPr>
+          <p:nvPr/>
+        </p:nvSpPr>
+        <p:spPr>
+          <a:xfrm xmlns:a="http://schemas.openxmlformats.org/drawingml/2006/main">
+            <a:off x="457200" y="2095500"/>
+            <a:ext cx="2724150" cy="1676400"/>
+          </a:xfrm>
+          <a:prstGeom xmlns:a="http://schemas.openxmlformats.org/drawingml/2006/main" prst="roundRect">
+            <a:avLst>
+              <a:gd name="adj" fmla="val 4545"/>
+            </a:avLst>
+          </a:prstGeom>
+          <a:solidFill xmlns:a="http://schemas.openxmlformats.org/drawingml/2006/main">
+            <a:srgbClr val="FFFFFF"/>
+          </a:solidFill>
+          <a:ln xmlns:a="http://schemas.openxmlformats.org/drawingml/2006/main" w="9525">
+            <a:solidFill>
+              <a:srgbClr val="D6DDE2"/>
+            </a:solidFill>
+            <a:prstDash val="solid"/>
+          </a:ln>
+        </p:spPr>
+        <p:txBody>
+          <a:bodyPr xmlns:a="http://schemas.openxmlformats.org/drawingml/2006/main" lIns="76200" tIns="38100" rIns="76200" bIns="38100" anchor="ctr"/>
+          <a:lstStyle xmlns:a="http://schemas.openxmlformats.org/drawingml/2006/main"/>
+          <a:p xmlns:a="http://schemas.openxmlformats.org/drawingml/2006/main">
+            <a:pPr algn="ctr">
+              <a:lnSpc>
+                <a:spcPct val="116000"/>
+              </a:lnSpc>
+              <a:buNone/>
+              <a:defRPr sz="1500" b="1">
+                <a:solidFill>
+                  <a:srgbClr val="263746"/>
+                </a:solidFill>
+              </a:defRPr>
+            </a:pPr>
+            <a:r>
+              <a:rPr sz="1500" b="1">
+                <a:solidFill>
+                  <a:srgbClr val="263746"/>
+                </a:solidFill>
+                <a:latin typeface="Microsoft YaHei"/>
+                <a:ea typeface="Microsoft YaHei"/>
+                <a:cs typeface="Microsoft YaHei"/>
+              </a:rPr>
+              <a:t>Context、目标、权限、Non-goal 与验收条件先写清</a:t>
+            </a:r>
+          </a:p>
+        </p:txBody>
+      </p:sp>
+      <p:sp>
+        <p:nvSpPr>
+          <p:cNvPr id="9" name="summary-10-number-1">
+            <a:extLst xmlns:a="http://schemas.openxmlformats.org/drawingml/2006/main">
+              <a:ext uri="{FF2B5EF4-FFF2-40B4-BE49-F238E27FC236}">
+                <a16:creationId xmlns:a16="http://schemas.microsoft.com/office/drawing/2014/main" id="{7FA8A677-6BAE-4A91-AC90-DC38508C97F0}"/>
+              </a:ext>
+            </a:extLst>
+          </p:cNvPr>
+          <p:cNvSpPr>
+            <a:spLocks xmlns:a="http://schemas.openxmlformats.org/drawingml/2006/main" noGrp="1"/>
+          </p:cNvSpPr>
+          <p:nvPr/>
+        </p:nvSpPr>
+        <p:spPr>
+          <a:xfrm xmlns:a="http://schemas.openxmlformats.org/drawingml/2006/main">
+            <a:off x="3371850" y="1219200"/>
+            <a:ext cx="476250" cy="476250"/>
+          </a:xfrm>
+          <a:prstGeom xmlns:a="http://schemas.openxmlformats.org/drawingml/2006/main" prst="roundRect">
+            <a:avLst>
+              <a:gd name="adj" fmla="val 16000"/>
+            </a:avLst>
+          </a:prstGeom>
+          <a:solidFill xmlns:a="http://schemas.openxmlformats.org/drawingml/2006/main">
+            <a:srgbClr val="28745A"/>
+          </a:solidFill>
+          <a:ln xmlns:a="http://schemas.openxmlformats.org/drawingml/2006/main" w="0">
+            <a:noFill/>
+            <a:prstDash val="solid"/>
+          </a:ln>
+        </p:spPr>
+        <p:txBody>
+          <a:bodyPr xmlns:a="http://schemas.openxmlformats.org/drawingml/2006/main" lIns="76200" tIns="38100" rIns="76200" bIns="38100" anchor="ctr"/>
+          <a:lstStyle xmlns:a="http://schemas.openxmlformats.org/drawingml/2006/main"/>
+          <a:p xmlns:a="http://schemas.openxmlformats.org/drawingml/2006/main">
+            <a:pPr algn="ctr">
+              <a:lnSpc>
+                <a:spcPct val="112000"/>
+              </a:lnSpc>
+              <a:buNone/>
+              <a:defRPr sz="1500" b="1">
+                <a:solidFill>
+                  <a:srgbClr val="FFFFFF"/>
+                </a:solidFill>
+              </a:defRPr>
+            </a:pPr>
+            <a:r>
+              <a:rPr sz="1500" b="1">
+                <a:solidFill>
+                  <a:srgbClr val="FFFFFF"/>
+                </a:solidFill>
+                <a:latin typeface="Arial"/>
+                <a:ea typeface="Arial"/>
+                <a:cs typeface="Arial"/>
+              </a:rPr>
+              <a:t>2</a:t>
+            </a:r>
+          </a:p>
+        </p:txBody>
+      </p:sp>
+      <p:sp>
+        <p:nvSpPr>
+          <p:cNvPr id="10" name="summary-10-heading-1">
+            <a:extLst xmlns:a="http://schemas.openxmlformats.org/drawingml/2006/main">
+              <a:ext uri="{FF2B5EF4-FFF2-40B4-BE49-F238E27FC236}">
+                <a16:creationId xmlns:a16="http://schemas.microsoft.com/office/drawing/2014/main" id="{3327524E-F26A-4D43-B92C-8B7CA8F9563F}"/>
+              </a:ext>
+            </a:extLst>
+          </p:cNvPr>
+          <p:cNvSpPr>
+            <a:spLocks xmlns:a="http://schemas.openxmlformats.org/drawingml/2006/main" noGrp="1"/>
+          </p:cNvSpPr>
+          <p:nvPr/>
+        </p:nvSpPr>
+        <p:spPr>
+          <a:xfrm xmlns:a="http://schemas.openxmlformats.org/drawingml/2006/main">
+            <a:off x="3943350" y="1162050"/>
+            <a:ext cx="2152650" cy="590550"/>
+          </a:xfrm>
+          <a:prstGeom xmlns:a="http://schemas.openxmlformats.org/drawingml/2006/main" prst="roundRect">
+            <a:avLst>
+              <a:gd name="adj" fmla="val 12903"/>
+            </a:avLst>
+          </a:prstGeom>
+          <a:solidFill xmlns:a="http://schemas.openxmlformats.org/drawingml/2006/main">
+            <a:srgbClr val="E7F2ED"/>
+          </a:solidFill>
+          <a:ln xmlns:a="http://schemas.openxmlformats.org/drawingml/2006/main" w="0">
+            <a:noFill/>
+            <a:prstDash val="solid"/>
+          </a:ln>
+        </p:spPr>
+        <p:txBody>
+          <a:bodyPr xmlns:a="http://schemas.openxmlformats.org/drawingml/2006/main" lIns="76200" tIns="38100" rIns="76200" bIns="38100" anchor="ctr"/>
+          <a:lstStyle xmlns:a="http://schemas.openxmlformats.org/drawingml/2006/main"/>
+          <a:p xmlns:a="http://schemas.openxmlformats.org/drawingml/2006/main">
+            <a:pPr algn="ctr">
+              <a:lnSpc>
+                <a:spcPct val="112000"/>
+              </a:lnSpc>
+              <a:buNone/>
+              <a:defRPr sz="1725" b="1">
+                <a:solidFill>
+                  <a:srgbClr val="28745A"/>
+                </a:solidFill>
+              </a:defRPr>
+            </a:pPr>
+            <a:r>
+              <a:rPr sz="1725" b="1">
+                <a:solidFill>
+                  <a:srgbClr val="28745A"/>
+                </a:solidFill>
+                <a:latin typeface="Microsoft YaHei"/>
+                <a:ea typeface="Microsoft YaHei"/>
+                <a:cs typeface="Microsoft YaHei"/>
+              </a:rPr>
+              <a:t>受限执行</a:t>
+            </a:r>
+          </a:p>
+        </p:txBody>
+      </p:sp>
+      <p:sp>
+        <p:nvSpPr>
+          <p:cNvPr id="11" name="summary-10-detail-1">
+            <a:extLst xmlns:a="http://schemas.openxmlformats.org/drawingml/2006/main">
+              <a:ext uri="{FF2B5EF4-FFF2-40B4-BE49-F238E27FC236}">
+                <a16:creationId xmlns:a16="http://schemas.microsoft.com/office/drawing/2014/main" id="{E7C845A8-805D-49D8-836E-23377537657F}"/>
+              </a:ext>
+            </a:extLst>
+          </p:cNvPr>
+          <p:cNvSpPr>
+            <a:spLocks xmlns:a="http://schemas.openxmlformats.org/drawingml/2006/main" noGrp="1"/>
+          </p:cNvSpPr>
+          <p:nvPr/>
+        </p:nvSpPr>
+        <p:spPr>
+          <a:xfrm xmlns:a="http://schemas.openxmlformats.org/drawingml/2006/main">
+            <a:off x="3371850" y="2095500"/>
+            <a:ext cx="2724150" cy="1676400"/>
+          </a:xfrm>
+          <a:prstGeom xmlns:a="http://schemas.openxmlformats.org/drawingml/2006/main" prst="roundRect">
+            <a:avLst>
+              <a:gd name="adj" fmla="val 4545"/>
+            </a:avLst>
+          </a:prstGeom>
+          <a:solidFill xmlns:a="http://schemas.openxmlformats.org/drawingml/2006/main">
+            <a:srgbClr val="FFFFFF"/>
+          </a:solidFill>
+          <a:ln xmlns:a="http://schemas.openxmlformats.org/drawingml/2006/main" w="9525">
+            <a:solidFill>
+              <a:srgbClr val="D6DDE2"/>
+            </a:solidFill>
+            <a:prstDash val="solid"/>
+          </a:ln>
+        </p:spPr>
+        <p:txBody>
+          <a:bodyPr xmlns:a="http://schemas.openxmlformats.org/drawingml/2006/main" lIns="76200" tIns="38100" rIns="76200" bIns="38100" anchor="ctr"/>
+          <a:lstStyle xmlns:a="http://schemas.openxmlformats.org/drawingml/2006/main"/>
+          <a:p xmlns:a="http://schemas.openxmlformats.org/drawingml/2006/main">
+            <a:pPr algn="ctr">
+              <a:lnSpc>
+                <a:spcPct val="116000"/>
+              </a:lnSpc>
+              <a:buNone/>
+              <a:defRPr sz="1500" b="1">
+                <a:solidFill>
+                  <a:srgbClr val="263746"/>
+                </a:solidFill>
+              </a:defRPr>
+            </a:pPr>
+            <a:r>
+              <a:rPr sz="1500" b="1">
+                <a:solidFill>
+                  <a:srgbClr val="263746"/>
+                </a:solidFill>
+                <a:latin typeface="Microsoft YaHei"/>
+                <a:ea typeface="Microsoft YaHei"/>
+                <a:cs typeface="Microsoft YaHei"/>
+              </a:rPr>
+              <a:t>最小权限运行，越权、失败与停止都必须保留</a:t>
+            </a:r>
+          </a:p>
+        </p:txBody>
+      </p:sp>
+      <p:sp>
+        <p:nvSpPr>
+          <p:cNvPr id="12" name="summary-10-number-2">
+            <a:extLst xmlns:a="http://schemas.openxmlformats.org/drawingml/2006/main">
+              <a:ext uri="{FF2B5EF4-FFF2-40B4-BE49-F238E27FC236}">
+                <a16:creationId xmlns:a16="http://schemas.microsoft.com/office/drawing/2014/main" id="{E6A2AA52-F395-4D78-BF10-F587EFCD30F6}"/>
+              </a:ext>
+            </a:extLst>
+          </p:cNvPr>
+          <p:cNvSpPr>
+            <a:spLocks xmlns:a="http://schemas.openxmlformats.org/drawingml/2006/main" noGrp="1"/>
+          </p:cNvSpPr>
+          <p:nvPr/>
+        </p:nvSpPr>
+        <p:spPr>
+          <a:xfrm xmlns:a="http://schemas.openxmlformats.org/drawingml/2006/main">
+            <a:off x="6286500" y="1219200"/>
+            <a:ext cx="476250" cy="476250"/>
+          </a:xfrm>
+          <a:prstGeom xmlns:a="http://schemas.openxmlformats.org/drawingml/2006/main" prst="roundRect">
+            <a:avLst>
+              <a:gd name="adj" fmla="val 16000"/>
+            </a:avLst>
+          </a:prstGeom>
+          <a:solidFill xmlns:a="http://schemas.openxmlformats.org/drawingml/2006/main">
+            <a:srgbClr val="C8161E"/>
+          </a:solidFill>
+          <a:ln xmlns:a="http://schemas.openxmlformats.org/drawingml/2006/main" w="0">
+            <a:noFill/>
+            <a:prstDash val="solid"/>
+          </a:ln>
+        </p:spPr>
+        <p:txBody>
+          <a:bodyPr xmlns:a="http://schemas.openxmlformats.org/drawingml/2006/main" lIns="76200" tIns="38100" rIns="76200" bIns="38100" anchor="ctr"/>
+          <a:lstStyle xmlns:a="http://schemas.openxmlformats.org/drawingml/2006/main"/>
+          <a:p xmlns:a="http://schemas.openxmlformats.org/drawingml/2006/main">
+            <a:pPr algn="ctr">
+              <a:lnSpc>
+                <a:spcPct val="112000"/>
+              </a:lnSpc>
+              <a:buNone/>
+              <a:defRPr sz="1500" b="1">
+                <a:solidFill>
+                  <a:srgbClr val="FFFFFF"/>
+                </a:solidFill>
+              </a:defRPr>
+            </a:pPr>
+            <a:r>
+              <a:rPr sz="1500" b="1">
+                <a:solidFill>
+                  <a:srgbClr val="FFFFFF"/>
+                </a:solidFill>
+                <a:latin typeface="Arial"/>
+                <a:ea typeface="Arial"/>
+                <a:cs typeface="Arial"/>
+              </a:rPr>
+              <a:t>3</a:t>
+            </a:r>
+          </a:p>
+        </p:txBody>
+      </p:sp>
+      <p:sp>
+        <p:nvSpPr>
+          <p:cNvPr id="13" name="summary-10-heading-2">
+            <a:extLst xmlns:a="http://schemas.openxmlformats.org/drawingml/2006/main">
+              <a:ext uri="{FF2B5EF4-FFF2-40B4-BE49-F238E27FC236}">
+                <a16:creationId xmlns:a16="http://schemas.microsoft.com/office/drawing/2014/main" id="{2952F14F-3DF4-4A6F-B342-CA16FFEFD9A8}"/>
+              </a:ext>
+            </a:extLst>
+          </p:cNvPr>
+          <p:cNvSpPr>
+            <a:spLocks xmlns:a="http://schemas.openxmlformats.org/drawingml/2006/main" noGrp="1"/>
+          </p:cNvSpPr>
+          <p:nvPr/>
+        </p:nvSpPr>
+        <p:spPr>
+          <a:xfrm xmlns:a="http://schemas.openxmlformats.org/drawingml/2006/main">
+            <a:off x="6858000" y="1162050"/>
+            <a:ext cx="2152650" cy="590550"/>
+          </a:xfrm>
+          <a:prstGeom xmlns:a="http://schemas.openxmlformats.org/drawingml/2006/main" prst="roundRect">
+            <a:avLst>
+              <a:gd name="adj" fmla="val 12903"/>
+            </a:avLst>
+          </a:prstGeom>
+          <a:solidFill xmlns:a="http://schemas.openxmlformats.org/drawingml/2006/main">
+            <a:srgbClr val="F8E9EA"/>
+          </a:solidFill>
+          <a:ln xmlns:a="http://schemas.openxmlformats.org/drawingml/2006/main" w="0">
+            <a:noFill/>
+            <a:prstDash val="solid"/>
+          </a:ln>
+        </p:spPr>
+        <p:txBody>
+          <a:bodyPr xmlns:a="http://schemas.openxmlformats.org/drawingml/2006/main" lIns="76200" tIns="38100" rIns="76200" bIns="38100" anchor="ctr"/>
+          <a:lstStyle xmlns:a="http://schemas.openxmlformats.org/drawingml/2006/main"/>
+          <a:p xmlns:a="http://schemas.openxmlformats.org/drawingml/2006/main">
+            <a:pPr algn="ctr">
+              <a:lnSpc>
+                <a:spcPct val="112000"/>
+              </a:lnSpc>
+              <a:buNone/>
+              <a:defRPr sz="1725" b="1">
+                <a:solidFill>
+                  <a:srgbClr val="C8161E"/>
+                </a:solidFill>
+              </a:defRPr>
+            </a:pPr>
+            <a:r>
+              <a:rPr sz="1725" b="1">
+                <a:solidFill>
+                  <a:srgbClr val="C8161E"/>
+                </a:solidFill>
+                <a:latin typeface="Microsoft YaHei"/>
+                <a:ea typeface="Microsoft YaHei"/>
+                <a:cs typeface="Microsoft YaHei"/>
+              </a:rPr>
+              <a:t>diff 与验证</a:t>
+            </a:r>
+          </a:p>
+        </p:txBody>
+      </p:sp>
+      <p:sp>
+        <p:nvSpPr>
+          <p:cNvPr id="14" name="summary-10-detail-2">
+            <a:extLst xmlns:a="http://schemas.openxmlformats.org/drawingml/2006/main">
+              <a:ext uri="{FF2B5EF4-FFF2-40B4-BE49-F238E27FC236}">
+                <a16:creationId xmlns:a16="http://schemas.microsoft.com/office/drawing/2014/main" id="{7324D555-D9C4-4A54-A7C0-A2FAC30D9F8F}"/>
+              </a:ext>
+            </a:extLst>
+          </p:cNvPr>
+          <p:cNvSpPr>
+            <a:spLocks xmlns:a="http://schemas.openxmlformats.org/drawingml/2006/main" noGrp="1"/>
+          </p:cNvSpPr>
+          <p:nvPr/>
+        </p:nvSpPr>
+        <p:spPr>
+          <a:xfrm xmlns:a="http://schemas.openxmlformats.org/drawingml/2006/main">
+            <a:off x="6286500" y="2095500"/>
+            <a:ext cx="2724150" cy="1676400"/>
+          </a:xfrm>
+          <a:prstGeom xmlns:a="http://schemas.openxmlformats.org/drawingml/2006/main" prst="roundRect">
+            <a:avLst>
+              <a:gd name="adj" fmla="val 4545"/>
+            </a:avLst>
+          </a:prstGeom>
+          <a:solidFill xmlns:a="http://schemas.openxmlformats.org/drawingml/2006/main">
+            <a:srgbClr val="FFFFFF"/>
+          </a:solidFill>
+          <a:ln xmlns:a="http://schemas.openxmlformats.org/drawingml/2006/main" w="9525">
+            <a:solidFill>
+              <a:srgbClr val="D6DDE2"/>
+            </a:solidFill>
+            <a:prstDash val="solid"/>
+          </a:ln>
+        </p:spPr>
+        <p:txBody>
+          <a:bodyPr xmlns:a="http://schemas.openxmlformats.org/drawingml/2006/main" lIns="76200" tIns="38100" rIns="76200" bIns="38100" anchor="ctr"/>
+          <a:lstStyle xmlns:a="http://schemas.openxmlformats.org/drawingml/2006/main"/>
+          <a:p xmlns:a="http://schemas.openxmlformats.org/drawingml/2006/main">
+            <a:pPr algn="ctr">
+              <a:lnSpc>
+                <a:spcPct val="116000"/>
+              </a:lnSpc>
+              <a:buNone/>
+              <a:defRPr sz="1500" b="1">
+                <a:solidFill>
+                  <a:srgbClr val="263746"/>
+                </a:solidFill>
+              </a:defRPr>
+            </a:pPr>
+            <a:r>
+              <a:rPr sz="1500" b="1">
+                <a:solidFill>
+                  <a:srgbClr val="263746"/>
+                </a:solidFill>
+                <a:latin typeface="Microsoft YaHei"/>
+                <a:ea typeface="Microsoft YaHei"/>
+                <a:cs typeface="Microsoft YaHei"/>
+              </a:rPr>
+              <a:t>先审查改动范围，再运行测试并做人工方法核验</a:t>
+            </a:r>
+          </a:p>
+        </p:txBody>
+      </p:sp>
+      <p:sp>
+        <p:nvSpPr>
+          <p:cNvPr id="15" name="summary-10-number-3">
+            <a:extLst xmlns:a="http://schemas.openxmlformats.org/drawingml/2006/main">
+              <a:ext uri="{FF2B5EF4-FFF2-40B4-BE49-F238E27FC236}">
+                <a16:creationId xmlns:a16="http://schemas.microsoft.com/office/drawing/2014/main" id="{7FA014F9-04C2-42D9-BA64-9FB762CB81C3}"/>
+              </a:ext>
+            </a:extLst>
+          </p:cNvPr>
+          <p:cNvSpPr>
+            <a:spLocks xmlns:a="http://schemas.openxmlformats.org/drawingml/2006/main" noGrp="1"/>
+          </p:cNvSpPr>
+          <p:nvPr/>
+        </p:nvSpPr>
+        <p:spPr>
+          <a:xfrm xmlns:a="http://schemas.openxmlformats.org/drawingml/2006/main">
+            <a:off x="9201150" y="1219200"/>
+            <a:ext cx="476250" cy="476250"/>
+          </a:xfrm>
+          <a:prstGeom xmlns:a="http://schemas.openxmlformats.org/drawingml/2006/main" prst="roundRect">
+            <a:avLst>
+              <a:gd name="adj" fmla="val 16000"/>
+            </a:avLst>
+          </a:prstGeom>
+          <a:solidFill xmlns:a="http://schemas.openxmlformats.org/drawingml/2006/main">
+            <a:srgbClr val="A86C12"/>
+          </a:solidFill>
+          <a:ln xmlns:a="http://schemas.openxmlformats.org/drawingml/2006/main" w="0">
+            <a:noFill/>
+            <a:prstDash val="solid"/>
+          </a:ln>
+        </p:spPr>
+        <p:txBody>
+          <a:bodyPr xmlns:a="http://schemas.openxmlformats.org/drawingml/2006/main" lIns="76200" tIns="38100" rIns="76200" bIns="38100" anchor="ctr"/>
+          <a:lstStyle xmlns:a="http://schemas.openxmlformats.org/drawingml/2006/main"/>
+          <a:p xmlns:a="http://schemas.openxmlformats.org/drawingml/2006/main">
+            <a:pPr algn="ctr">
+              <a:lnSpc>
+                <a:spcPct val="112000"/>
+              </a:lnSpc>
+              <a:buNone/>
+              <a:defRPr sz="1500" b="1">
+                <a:solidFill>
+                  <a:srgbClr val="FFFFFF"/>
+                </a:solidFill>
+              </a:defRPr>
+            </a:pPr>
+            <a:r>
+              <a:rPr sz="1500" b="1">
+                <a:solidFill>
+                  <a:srgbClr val="FFFFFF"/>
+                </a:solidFill>
+                <a:latin typeface="Arial"/>
+                <a:ea typeface="Arial"/>
+                <a:cs typeface="Arial"/>
+              </a:rPr>
+              <a:t>4</a:t>
+            </a:r>
+          </a:p>
+        </p:txBody>
+      </p:sp>
+      <p:sp>
+        <p:nvSpPr>
+          <p:cNvPr id="16" name="summary-10-heading-3">
+            <a:extLst xmlns:a="http://schemas.openxmlformats.org/drawingml/2006/main">
+              <a:ext uri="{FF2B5EF4-FFF2-40B4-BE49-F238E27FC236}">
+                <a16:creationId xmlns:a16="http://schemas.microsoft.com/office/drawing/2014/main" id="{3D1CBA58-C587-4B1A-BE2B-0B259DE93121}"/>
+              </a:ext>
+            </a:extLst>
+          </p:cNvPr>
+          <p:cNvSpPr>
+            <a:spLocks xmlns:a="http://schemas.openxmlformats.org/drawingml/2006/main" noGrp="1"/>
+          </p:cNvSpPr>
+          <p:nvPr/>
+        </p:nvSpPr>
+        <p:spPr>
+          <a:xfrm xmlns:a="http://schemas.openxmlformats.org/drawingml/2006/main">
+            <a:off x="9772650" y="1162050"/>
+            <a:ext cx="2152650" cy="590550"/>
+          </a:xfrm>
+          <a:prstGeom xmlns:a="http://schemas.openxmlformats.org/drawingml/2006/main" prst="roundRect">
+            <a:avLst>
+              <a:gd name="adj" fmla="val 12903"/>
+            </a:avLst>
+          </a:prstGeom>
+          <a:solidFill xmlns:a="http://schemas.openxmlformats.org/drawingml/2006/main">
+            <a:srgbClr val="FAF0DD"/>
+          </a:solidFill>
+          <a:ln xmlns:a="http://schemas.openxmlformats.org/drawingml/2006/main" w="0">
+            <a:noFill/>
+            <a:prstDash val="solid"/>
+          </a:ln>
+        </p:spPr>
+        <p:txBody>
+          <a:bodyPr xmlns:a="http://schemas.openxmlformats.org/drawingml/2006/main" lIns="76200" tIns="38100" rIns="76200" bIns="38100" anchor="ctr"/>
+          <a:lstStyle xmlns:a="http://schemas.openxmlformats.org/drawingml/2006/main"/>
+          <a:p xmlns:a="http://schemas.openxmlformats.org/drawingml/2006/main">
+            <a:pPr algn="ctr">
+              <a:lnSpc>
+                <a:spcPct val="112000"/>
+              </a:lnSpc>
+              <a:buNone/>
+              <a:defRPr sz="1725" b="1">
+                <a:solidFill>
+                  <a:srgbClr val="A86C12"/>
+                </a:solidFill>
+              </a:defRPr>
+            </a:pPr>
+            <a:r>
+              <a:rPr sz="1725" b="1">
+                <a:solidFill>
+                  <a:srgbClr val="A86C12"/>
+                </a:solidFill>
+                <a:latin typeface="Microsoft YaHei"/>
+                <a:ea typeface="Microsoft YaHei"/>
+                <a:cs typeface="Microsoft YaHei"/>
+              </a:rPr>
+              <a:t>失败保留</a:t>
+            </a:r>
+          </a:p>
+        </p:txBody>
+      </p:sp>
+      <p:sp>
+        <p:nvSpPr>
+          <p:cNvPr id="17" name="summary-10-detail-3">
+            <a:extLst xmlns:a="http://schemas.openxmlformats.org/drawingml/2006/main">
+              <a:ext uri="{FF2B5EF4-FFF2-40B4-BE49-F238E27FC236}">
+                <a16:creationId xmlns:a16="http://schemas.microsoft.com/office/drawing/2014/main" id="{AF840E45-BE62-4E70-AF56-7157406152BC}"/>
+              </a:ext>
+            </a:extLst>
+          </p:cNvPr>
+          <p:cNvSpPr>
+            <a:spLocks xmlns:a="http://schemas.openxmlformats.org/drawingml/2006/main" noGrp="1"/>
+          </p:cNvSpPr>
+          <p:nvPr/>
+        </p:nvSpPr>
+        <p:spPr>
+          <a:xfrm xmlns:a="http://schemas.openxmlformats.org/drawingml/2006/main">
+            <a:off x="9201150" y="2095500"/>
+            <a:ext cx="2724150" cy="1676400"/>
+          </a:xfrm>
+          <a:prstGeom xmlns:a="http://schemas.openxmlformats.org/drawingml/2006/main" prst="roundRect">
+            <a:avLst>
+              <a:gd name="adj" fmla="val 4545"/>
+            </a:avLst>
+          </a:prstGeom>
+          <a:solidFill xmlns:a="http://schemas.openxmlformats.org/drawingml/2006/main">
+            <a:srgbClr val="FFFFFF"/>
+          </a:solidFill>
+          <a:ln xmlns:a="http://schemas.openxmlformats.org/drawingml/2006/main" w="9525">
+            <a:solidFill>
+              <a:srgbClr val="D6DDE2"/>
+            </a:solidFill>
+            <a:prstDash val="solid"/>
+          </a:ln>
+        </p:spPr>
+        <p:txBody>
+          <a:bodyPr xmlns:a="http://schemas.openxmlformats.org/drawingml/2006/main" lIns="76200" tIns="38100" rIns="76200" bIns="38100" anchor="ctr"/>
+          <a:lstStyle xmlns:a="http://schemas.openxmlformats.org/drawingml/2006/main"/>
+          <a:p xmlns:a="http://schemas.openxmlformats.org/drawingml/2006/main">
+            <a:pPr algn="ctr">
+              <a:lnSpc>
+                <a:spcPct val="116000"/>
+              </a:lnSpc>
+              <a:buNone/>
+              <a:defRPr sz="1500" b="1">
+                <a:solidFill>
+                  <a:srgbClr val="263746"/>
+                </a:solidFill>
+              </a:defRPr>
+            </a:pPr>
+            <a:r>
+              <a:rPr sz="1500" b="1">
+                <a:solidFill>
+                  <a:srgbClr val="263746"/>
+                </a:solidFill>
+                <a:latin typeface="Microsoft YaHei"/>
+                <a:ea typeface="Microsoft YaHei"/>
+                <a:cs typeface="Microsoft YaHei"/>
+              </a:rPr>
+              <a:t>根因修复、绕过失败与污染实验必须明确区分</a:t>
+            </a:r>
+          </a:p>
+        </p:txBody>
+      </p:sp>
+      <p:sp>
+        <p:nvSpPr>
+          <p:cNvPr id="18" name="summary-10-boundary">
+            <a:extLst xmlns:a="http://schemas.openxmlformats.org/drawingml/2006/main">
+              <a:ext uri="{FF2B5EF4-FFF2-40B4-BE49-F238E27FC236}">
+                <a16:creationId xmlns:a16="http://schemas.microsoft.com/office/drawing/2014/main" id="{60D09DD2-982F-4211-9FF7-15770EFC5B24}"/>
+              </a:ext>
+            </a:extLst>
+          </p:cNvPr>
+          <p:cNvSpPr>
+            <a:spLocks xmlns:a="http://schemas.openxmlformats.org/drawingml/2006/main" noGrp="1"/>
+          </p:cNvSpPr>
+          <p:nvPr/>
+        </p:nvSpPr>
+        <p:spPr>
+          <a:xfrm xmlns:a="http://schemas.openxmlformats.org/drawingml/2006/main">
+            <a:off x="1162050" y="4400550"/>
+            <a:ext cx="9867900" cy="876300"/>
+          </a:xfrm>
+          <a:prstGeom xmlns:a="http://schemas.openxmlformats.org/drawingml/2006/main" prst="roundRect">
+            <a:avLst>
+              <a:gd name="adj" fmla="val 8696"/>
+            </a:avLst>
+          </a:prstGeom>
+          <a:solidFill xmlns:a="http://schemas.openxmlformats.org/drawingml/2006/main">
+            <a:srgbClr val="F8E9EA"/>
+          </a:solidFill>
+          <a:ln xmlns:a="http://schemas.openxmlformats.org/drawingml/2006/main" w="0">
+            <a:noFill/>
+            <a:prstDash val="solid"/>
+          </a:ln>
+        </p:spPr>
+        <p:txBody>
+          <a:bodyPr xmlns:a="http://schemas.openxmlformats.org/drawingml/2006/main" lIns="76200" tIns="38100" rIns="76200" bIns="38100" anchor="ctr"/>
+          <a:lstStyle xmlns:a="http://schemas.openxmlformats.org/drawingml/2006/main"/>
+          <a:p xmlns:a="http://schemas.openxmlformats.org/drawingml/2006/main">
+            <a:pPr algn="ctr">
+              <a:lnSpc>
+                <a:spcPct val="114000"/>
+              </a:lnSpc>
+              <a:buNone/>
+              <a:defRPr sz="1725" b="1">
+                <a:solidFill>
+                  <a:srgbClr val="C8161E"/>
+                </a:solidFill>
+              </a:defRPr>
+            </a:pPr>
+            <a:r>
+              <a:rPr sz="1725" b="1">
+                <a:solidFill>
+                  <a:srgbClr val="C8161E"/>
+                </a:solidFill>
+                <a:latin typeface="Microsoft YaHei"/>
+                <a:ea typeface="Microsoft YaHei"/>
+                <a:cs typeface="Microsoft YaHei"/>
+              </a:rPr>
+              <a:t>关键边界：测试通过只说明候选改动满足部分判定，不等于研究方法、结果或归因已经正确。</a:t>
+            </a:r>
+          </a:p>
+        </p:txBody>
+      </p:sp>
+    </p:spTree>
+    <p:extLst>
+      <p:ext uri="{BB962C8B-B14F-4D97-AF65-F5344CB8AC3E}">
+        <p14:creationId xmlns:p14="http://schemas.microsoft.com/office/powerpoint/2010/main" val="1443728403"/>
+      </p:ext>
+    </p:extLst>
+  </p:cSld>
+</p:sld>
+</file>
+
+<file path=ppt/slides/slide17.xml><?xml version="1.0" encoding="utf-8"?>
+<p:sld xmlns:p="http://schemas.openxmlformats.org/presentationml/2006/main">
+  <p:cSld>
+    <p:spTree>
+      <p:nvGrpSpPr>
+        <p:cNvPr id="1" name=""/>
+        <p:cNvGrpSpPr/>
+        <p:nvPr/>
+      </p:nvGrpSpPr>
+      <p:grpSpPr>
+        <a:xfrm xmlns:a="http://schemas.openxmlformats.org/drawingml/2006/main"/>
+      </p:grpSpPr>
+      <p:sp>
+        <p:nvSpPr>
+          <p:cNvPr id="4" name="Text Placeholder 3">
+            <a:extLst xmlns:a="http://schemas.openxmlformats.org/drawingml/2006/main">
+              <a:ext uri="{FF2B5EF4-FFF2-40B4-BE49-F238E27FC236}">
+                <a16:creationId xmlns:a16="http://schemas.microsoft.com/office/drawing/2014/main" id="{4D941B40-7A0A-534E-3563-CA11753C8E3F}"/>
+              </a:ext>
+            </a:extLst>
+          </p:cNvPr>
+          <p:cNvSpPr>
+            <a:spLocks xmlns:a="http://schemas.openxmlformats.org/drawingml/2006/main" noGrp="1"/>
+          </p:cNvSpPr>
+          <p:nvPr>
+            <p:ph type="body" idx="14"/>
+          </p:nvPr>
+        </p:nvSpPr>
+        <p:spPr>
+          <a:xfrm xmlns:a="http://schemas.openxmlformats.org/drawingml/2006/main">
+            <a:off x="1028700" y="28575"/>
+            <a:ext cx="10668000" cy="628650"/>
+          </a:xfrm>
+        </p:spPr>
+        <p:txBody>
+          <a:bodyPr xmlns:a="http://schemas.openxmlformats.org/drawingml/2006/main" lIns="76200" tIns="0" rIns="76200" bIns="0" anchor="ctr"/>
+          <a:lstStyle xmlns:a="http://schemas.openxmlformats.org/drawingml/2006/main"/>
+          <a:p xmlns:a="http://schemas.openxmlformats.org/drawingml/2006/main">
+            <a:pPr algn="l">
+              <a:buNone/>
+            </a:pPr>
+            <a:r>
+              <a:rPr sz="2250" b="1">
+                <a:solidFill>
+                  <a:srgbClr val="FFFFFF"/>
+                </a:solidFill>
+                <a:latin typeface="Microsoft YaHei"/>
+                <a:ea typeface="Microsoft YaHei"/>
+                <a:cs typeface="Microsoft YaHei"/>
+              </a:rPr>
+              <a:t>退出卡：这次 Agent 执行可以被安全地重复吗</a:t>
+            </a:r>
+            <a:endParaRPr/>
+          </a:p>
+        </p:txBody>
+      </p:sp>
+      <p:sp>
+        <p:nvSpPr>
+          <p:cNvPr id="5" name="Slide Number Placeholder 4">
+            <a:extLst xmlns:a="http://schemas.openxmlformats.org/drawingml/2006/main">
+              <a:ext uri="{FF2B5EF4-FFF2-40B4-BE49-F238E27FC236}">
+                <a16:creationId xmlns:a16="http://schemas.microsoft.com/office/drawing/2014/main" id="{EBA5909F-738E-F60C-BE8C-B3F1D94548E5}"/>
+              </a:ext>
+            </a:extLst>
+          </p:cNvPr>
+          <p:cNvSpPr>
+            <a:spLocks xmlns:a="http://schemas.openxmlformats.org/drawingml/2006/main" noGrp="1"/>
+          </p:cNvSpPr>
+          <p:nvPr>
+            <p:ph type="sldNum" idx="10"/>
+          </p:nvPr>
+        </p:nvSpPr>
+        <p:spPr/>
+        <p:txBody>
+          <a:bodyPr xmlns:a="http://schemas.openxmlformats.org/drawingml/2006/main"/>
+          <a:lstStyle xmlns:a="http://schemas.openxmlformats.org/drawingml/2006/main"/>
+          <a:p xmlns:a="http://schemas.openxmlformats.org/drawingml/2006/main">
+            <a:fld id="{90F7333B-44AC-F7E9-D49D-FE92F45E0477}" type="slidenum">
+              <a:t>17</a:t>
             </a:fld>
             <a:endParaRPr/>
           </a:p>
